--- a/public/materialy/1L/7/Prezentace k hodinám/6. Ověřování zdrojů metodou 5P.pptx
+++ b/public/materialy/1L/7/Prezentace k hodinám/6. Ověřování zdrojů metodou 5P.pptx
@@ -548,7 +548,7 @@
           </a:p>
           <a:p xmlns:a="http://schemas.openxmlformats.org/drawingml/2006/main">
             <a:r>
-              <a:t>Soubory: 06_zdroj_A.html, 06_zdroj_B.html, 06_zdroj_C.html z balíčku V2</a:t>
+              <a:t>Soubory: 6. Zdroj A.html, 6. Zdroj B.html, 6. Zdroj C.html z balíčku V2</a:t>
             </a:r>
           </a:p>
           <a:p xmlns:a="http://schemas.openxmlformats.org/drawingml/2006/main">
@@ -808,7 +808,7 @@
           <a:lstStyle xmlns:a="http://schemas.openxmlformats.org/drawingml/2006/main"/>
           <a:p xmlns:a="http://schemas.openxmlformats.org/drawingml/2006/main">
             <a:r>
-              <a:t>Hlavní aktivita využívá: 06_zdroj_A.html, 06_zdroj_B.html, 06_zdroj_C.html z balíčku V2</a:t>
+              <a:t>Hlavní aktivita využívá: 6. Zdroj A.html, 6. Zdroj B.html, 6. Zdroj C.html z balíčku V2</a:t>
             </a:r>
           </a:p>
           <a:p xmlns:a="http://schemas.openxmlformats.org/drawingml/2006/main">
@@ -3485,7 +3485,7 @@
               </a:defRPr>
             </a:pPr>
             <a:r>
-              <a:t>06_zdroj_A.html, 06_zdroj_B.html, 06_zdroj_C.html z balíčku V2</a:t>
+              <a:t>6. Zdroj A.html, 6. Zdroj B.html, 6. Zdroj C.html z balíčku V2</a:t>
             </a:r>
           </a:p>
         </p:txBody>

--- a/public/materialy/1L/7/Prezentace k hodinám/6. Ověřování zdrojů metodou 5P.pptx
+++ b/public/materialy/1L/7/Prezentace k hodinám/6. Ověřování zdrojů metodou 5P.pptx
@@ -3485,7 +3485,7 @@
               </a:defRPr>
             </a:pPr>
             <a:r>
-              <a:t>6. Zdroj A.html, 6. Zdroj B.html, 6. Zdroj C.html z balíčku V2</a:t>
+              <a:t>6. Zdroj A.html, 6. Zdroj B.html, 6. Zdroj C.html ze složky Podklady k aktivitám</a:t>
             </a:r>
           </a:p>
         </p:txBody>

--- a/public/materialy/1L/7/Prezentace k hodinám/6. Ověřování zdrojů metodou 5P.pptx
+++ b/public/materialy/1L/7/Prezentace k hodinám/6. Ověřování zdrojů metodou 5P.pptx
@@ -558,7 +558,7 @@
           </a:p>
           <a:p xmlns:a="http://schemas.openxmlformats.org/drawingml/2006/main">
             <a:r>
-              <a:t>Před otevřením dalšího snímku stručně uveďte téma a nechte studenty připravit pracovní soubory.</a:t>
+              <a:t>Před otevřením dalšího snímku stručně uveď téma a nech studenty připravit pracovní soubory.</a:t>
             </a:r>
           </a:p>
         </p:txBody>
@@ -648,7 +648,7 @@
           </a:p>
           <a:p xmlns:a="http://schemas.openxmlformats.org/drawingml/2006/main">
             <a:r>
-              <a:t>Neprozrazujte správnou odpověď. Cílem je zachytit počáteční úsudek, ke kterému se třída vrátí při reflexi.</a:t>
+              <a:t>Neprozrazuj správnou odpověď. Cílem je zachytit počáteční úsudek, ke kterému se třída vrátí při reflexi.</a:t>
             </a:r>
           </a:p>
         </p:txBody>
@@ -728,7 +728,7 @@
           </a:p>
           <a:p xmlns:a="http://schemas.openxmlformats.org/drawingml/2006/main">
             <a:r>
-              <a:t>Postup učitele: Ke každému P společně formulujte jednu kontrolní otázku.</a:t>
+              <a:t>Postup učitele: Ke každému P společně formuluj jednu kontrolní otázku.</a:t>
             </a:r>
           </a:p>
           <a:p xmlns:a="http://schemas.openxmlformats.org/drawingml/2006/main">
@@ -738,7 +738,7 @@
           </a:p>
           <a:p xmlns:a="http://schemas.openxmlformats.org/drawingml/2006/main">
             <a:r>
-              <a:t>Nechte studenty doplnit příklad ke každému bodu. Přechod k aktivitě proveďte otázkou: Jak tyto tři body použijeme na dnešní soubor?</a:t>
+              <a:t>Nech studenty doplnit příklad ke každému bodu. Přechod k aktivitě proveď otázkou: Jak tyto tři body použijeme na dnešní soubor?</a:t>
             </a:r>
           </a:p>
         </p:txBody>
@@ -813,17 +813,17 @@
           </a:p>
           <a:p xmlns:a="http://schemas.openxmlformats.org/drawingml/2006/main">
             <a:r>
-              <a:t>11–19 min – Zdroj B: Porovnejte přesnost titulku, velikost vzorku a uvedená omezení.</a:t>
-            </a:r>
-          </a:p>
-          <a:p xmlns:a="http://schemas.openxmlformats.org/drawingml/2006/main">
-            <a:r>
-              <a:t>19–30 min – Zdroj C: Dohledávejte původní tvrzení, metodu, výsledek a limity.</a:t>
-            </a:r>
-          </a:p>
-          <a:p xmlns:a="http://schemas.openxmlformats.org/drawingml/2006/main">
-            <a:r>
-              <a:t>30–39 min – Protokol a nový titulek: Požadujte formulaci odpovídající skutečné síle podkladů.</a:t>
+              <a:t>11–19 min – Zdroj B: Porovnej přesnost titulku, velikost vzorku a uvedená omezení.</a:t>
+            </a:r>
+          </a:p>
+          <a:p xmlns:a="http://schemas.openxmlformats.org/drawingml/2006/main">
+            <a:r>
+              <a:t>19–30 min – Zdroj C: Dohledávej původní tvrzení, metodu, výsledek a limity.</a:t>
+            </a:r>
+          </a:p>
+          <a:p xmlns:a="http://schemas.openxmlformats.org/drawingml/2006/main">
+            <a:r>
+              <a:t>30–39 min – Protokol a nový titulek: Požaduj formulaci odpovídající skutečné síle podkladů.</a:t>
             </a:r>
           </a:p>
           <a:p xmlns:a="http://schemas.openxmlformats.org/drawingml/2006/main">
@@ -838,7 +838,7 @@
           </a:p>
           <a:p xmlns:a="http://schemas.openxmlformats.org/drawingml/2006/main">
             <a:r>
-              <a:t>Během práce nepřebírejte myš za studenta. Pomáhejte otázkami z dalšího snímku a žádejte, aby každé rozhodnutí opřel o konkrétní znak nebo zdroj.</a:t>
+              <a:t>Během práce nepřebírej myš za studenta. Pomáhej otázkami z dalšího snímku a žádej, aby každé rozhodnutí opřel o konkrétní znak nebo zdroj.</a:t>
             </a:r>
           </a:p>
         </p:txBody>
@@ -918,7 +918,7 @@
           </a:p>
           <a:p xmlns:a="http://schemas.openxmlformats.org/drawingml/2006/main">
             <a:r>
-              <a:t>Podpora: Rozdělte protokol na pět barevně označených polí a každé skupině přidělte nejprve jedno P.</a:t>
+              <a:t>Podpora: Rozděl protokol na pět barevně označených polí a každé skupině přiděl nejprve jedno P.</a:t>
             </a:r>
           </a:p>
           <a:p xmlns:a="http://schemas.openxmlformats.org/drawingml/2006/main">
@@ -928,7 +928,7 @@
           </a:p>
           <a:p xmlns:a="http://schemas.openxmlformats.org/drawingml/2006/main">
             <a:r>
-              <a:t>Pro rychlou mezikontrolu nechte dvojice vyměnit výstup a označit jeden dobře doložený bod a jednu otázku, která ještě zůstává.</a:t>
+              <a:t>Pro rychlou mezikontrolu nech dvojice vyměnit výstup a označit jeden dobře doložený bod a jednu otázku, která ještě zůstává.</a:t>
             </a:r>
           </a:p>
         </p:txBody>
@@ -1003,12 +1003,12 @@
           </a:p>
           <a:p xmlns:a="http://schemas.openxmlformats.org/drawingml/2006/main">
             <a:r>
-              <a:t>Časté chyby a intervence: „Profesionální vzhled znamená důvěryhodnost.“ → Design je pouze signál; rozhodují původ, podklady, transparentnost a nezávislé potvrzení. | „Zdroj B je původní studie.“ → Univerzitní zpráva výzkum shrnuje; původní metoda a omezení jsou až ve zdroji C. | Student rozhodne jen pravda/nepravda. → Požadujte přesnější formulaci a míru jistoty: potvrzeno, vyvráceno, nebo nelze rozhodnout.</a:t>
-            </a:r>
-          </a:p>
-          <a:p xmlns:a="http://schemas.openxmlformats.org/drawingml/2006/main">
-            <a:r>
-              <a:t>Nečtěte celý klíč. Vyberte dva studentské postupy, které vedou k odlišným závěrům, a nechte třídu určit, který je lépe podložený.</a:t>
+              <a:t>Časté chyby a intervence: „Profesionální vzhled znamená důvěryhodnost.“ → Design je pouze signál; rozhodují původ, podklady, transparentnost a nezávislé potvrzení. | „Zdroj B je původní studie.“ → Univerzitní zpráva výzkum shrnuje; původní metoda a omezení jsou až ve zdroji C. | Student rozhodne jen pravda/nepravda. → Požaduj přesnější formulaci a míru jistoty: potvrzeno, vyvráceno, nebo nelze rozhodnout.</a:t>
+            </a:r>
+          </a:p>
+          <a:p xmlns:a="http://schemas.openxmlformats.org/drawingml/2006/main">
+            <a:r>
+              <a:t>Nečti celý klíč. Vyber dva studentské postupy, které vedou k odlišným závěrům, a nech třídu určit, který je lépe podložený.</a:t>
             </a:r>
           </a:p>
         </p:txBody>
@@ -1083,7 +1083,7 @@
           </a:p>
           <a:p xmlns:a="http://schemas.openxmlformats.org/drawingml/2006/main">
             <a:r>
-              <a:t>Podpora: Rozdělte protokol na pět barevně označených polí a každé skupině přidělte nejprve jedno P.</a:t>
+              <a:t>Podpora: Rozděl protokol na pět barevně označených polí a každé skupině přiděl nejprve jedno P.</a:t>
             </a:r>
           </a:p>
           <a:p xmlns:a="http://schemas.openxmlformats.org/drawingml/2006/main">
@@ -1093,12 +1093,12 @@
           </a:p>
           <a:p xmlns:a="http://schemas.openxmlformats.org/drawingml/2006/main">
             <a:r>
-              <a:t>Když technika selže: Všechny tři zdroje jsou offline; při problému s prohlížečem použijte jejich shrnutí v pracovním sešitu.</a:t>
-            </a:r>
-          </a:p>
-          <a:p xmlns:a="http://schemas.openxmlformats.org/drawingml/2006/main">
-            <a:r>
-              <a:t>Vyberte způsob odevzdání předem. Odpověď použijte jako diagnostiku pro začátek další hodiny; nehodnoťte pouze formální správnost, ale konkrétnost a zdůvodnění.</a:t>
+              <a:t>Když technika selže: Všechny tři zdroje jsou offline; při problému s prohlížečem použij jejich shrnutí v pracovním sešitu.</a:t>
+            </a:r>
+          </a:p>
+          <a:p xmlns:a="http://schemas.openxmlformats.org/drawingml/2006/main">
+            <a:r>
+              <a:t>Vyber způsob odevzdání předem. Odpověď použij jako diagnostiku pro začátek další hodiny; nehodnoť pouze formální správnost, ale konkrétnost a zdůvodnění.</a:t>
             </a:r>
           </a:p>
         </p:txBody>

--- a/public/materialy/1L/7/Prezentace k hodinám/6. Ověřování zdrojů metodou 5P.pptx
+++ b/public/materialy/1L/7/Prezentace k hodinám/6. Ověřování zdrojů metodou 5P.pptx
@@ -548,7 +548,7 @@
           </a:p>
           <a:p xmlns:a="http://schemas.openxmlformats.org/drawingml/2006/main">
             <a:r>
-              <a:t>Soubory: 6. Zdroj A.html, 6. Zdroj B.html, 6. Zdroj C.html z balíčku V2</a:t>
+              <a:t>Soubory: Zdroj A.html, Zdroj B.html, Zdroj C.html z balíčku V2</a:t>
             </a:r>
           </a:p>
           <a:p xmlns:a="http://schemas.openxmlformats.org/drawingml/2006/main">
@@ -808,7 +808,7 @@
           <a:lstStyle xmlns:a="http://schemas.openxmlformats.org/drawingml/2006/main"/>
           <a:p xmlns:a="http://schemas.openxmlformats.org/drawingml/2006/main">
             <a:r>
-              <a:t>Hlavní aktivita využívá: 6. Zdroj A.html, 6. Zdroj B.html, 6. Zdroj C.html z balíčku V2</a:t>
+              <a:t>Hlavní aktivita využívá: Zdroj A.html, Zdroj B.html, Zdroj C.html z balíčku V2</a:t>
             </a:r>
           </a:p>
           <a:p xmlns:a="http://schemas.openxmlformats.org/drawingml/2006/main">
@@ -3485,7 +3485,7 @@
               </a:defRPr>
             </a:pPr>
             <a:r>
-              <a:t>6. Zdroj A.html, 6. Zdroj B.html, 6. Zdroj C.html ze složky Podklady k aktivitám</a:t>
+              <a:t>Zdroj A.html, Zdroj B.html, Zdroj C.html ze složky Podklady k aktivitám</a:t>
             </a:r>
           </a:p>
         </p:txBody>

--- a/public/materialy/1L/7/Prezentace k hodinám/6. Ověřování zdrojů metodou 5P.pptx
+++ b/public/materialy/1L/7/Prezentace k hodinám/6. Ověřování zdrojů metodou 5P.pptx
@@ -543,22 +543,22 @@
           <a:lstStyle xmlns:a="http://schemas.openxmlformats.org/drawingml/2006/main"/>
           <a:p xmlns:a="http://schemas.openxmlformats.org/drawingml/2006/main">
             <a:r>
-              <a:t>Výukový cíl: Student postupně porovná clickbaitový web, univerzitní zprávu a původní studii a vytvoří přiměřený závěr.</a:t>
-            </a:r>
-          </a:p>
-          <a:p xmlns:a="http://schemas.openxmlformats.org/drawingml/2006/main">
-            <a:r>
-              <a:t>Soubory: Zdroj A.html, Zdroj B.html, Zdroj C.html z balíčku V2</a:t>
-            </a:r>
-          </a:p>
-          <a:p xmlns:a="http://schemas.openxmlformats.org/drawingml/2006/main">
-            <a:r>
-              <a:t>Výstup: Protokol 5P, opravený titulek a závěr s vyjádřenou mírou jistoty.</a:t>
-            </a:r>
-          </a:p>
-          <a:p xmlns:a="http://schemas.openxmlformats.org/drawingml/2006/main">
-            <a:r>
-              <a:t>Před otevřením dalšího snímku stručně uveď téma a nech studenty připravit pracovní soubory.</a:t>
+              <a:t>Výukový cíl: Student postupně porovná clickbaitový web, univerzitní zprávu a původní studii a vytvoří přiměřený závěr.</a:t>
+            </a:r>
+          </a:p>
+          <a:p xmlns:a="http://schemas.openxmlformats.org/drawingml/2006/main">
+            <a:r>
+              <a:t>Soubory: Zdroj A.html, Zdroj B.html, Zdroj C.html z balíčku V2</a:t>
+            </a:r>
+          </a:p>
+          <a:p xmlns:a="http://schemas.openxmlformats.org/drawingml/2006/main">
+            <a:r>
+              <a:t>Výstup: Protokol 5P, opravený titulek a závěr s vyjádřenou mírou jistoty.</a:t>
+            </a:r>
+          </a:p>
+          <a:p xmlns:a="http://schemas.openxmlformats.org/drawingml/2006/main">
+            <a:r>
+              <a:t>Před otevřením dalšího snímku stručně uveď téma a nech studenty připravit pracovní soubory.</a:t>
             </a:r>
           </a:p>
         </p:txBody>
@@ -638,7 +638,7 @@
           </a:p>
           <a:p xmlns:a="http://schemas.openxmlformats.org/drawingml/2006/main">
             <a:r>
-              <a:t>Postup učitele: Studenti samostatně zapíší, čemu článek chce, aby věřili a co udělali.</a:t>
+              <a:t>Postup učitele: Studenti samostatně zapíší, čemu článek chce, aby věřili a co udělali.</a:t>
             </a:r>
           </a:p>
           <a:p xmlns:a="http://schemas.openxmlformats.org/drawingml/2006/main">
@@ -733,12 +733,12 @@
           </a:p>
           <a:p xmlns:a="http://schemas.openxmlformats.org/drawingml/2006/main">
             <a:r>
-              <a:t>Klíčové závěry: Původce: A je komerční web prodávající playlist, B univerzitní komunikace, C původní fiktivní odborná studie. | Původní zdroj: Zdroj C s popisem metody, dat a omezení. | Podklady: 32 účastníků, tři podmínky a tři krátké úlohy; rozdíl se projevil pouze v jedné úloze.</a:t>
-            </a:r>
-          </a:p>
-          <a:p xmlns:a="http://schemas.openxmlformats.org/drawingml/2006/main">
-            <a:r>
-              <a:t>Nech studenty doplnit příklad ke každému bodu. Přechod k aktivitě proveď otázkou: Jak tyto tři body použijeme na dnešní soubor?</a:t>
+              <a:t>Klíčové závěry: Původce: A je komerční web prodávající playlist, B univerzitní komunikace, C původní fiktivní odborná studie. | Původní zdroj: Zdroj C s popisem metody, dat a omezení. | Podklady: 32 účastníků, tři podmínky a tři krátké úlohy; rozdíl se projevil pouze v jedné úloze.</a:t>
+            </a:r>
+          </a:p>
+          <a:p xmlns:a="http://schemas.openxmlformats.org/drawingml/2006/main">
+            <a:r>
+              <a:t>Nech studenty doplnit příklad ke každému bodu. Přechod k aktivitě proveď otázkou: Jak tyto tři body použijeme na dnešní soubor?</a:t>
             </a:r>
           </a:p>
         </p:txBody>
@@ -808,22 +808,22 @@
           <a:lstStyle xmlns:a="http://schemas.openxmlformats.org/drawingml/2006/main"/>
           <a:p xmlns:a="http://schemas.openxmlformats.org/drawingml/2006/main">
             <a:r>
-              <a:t>Hlavní aktivita využívá: Zdroj A.html, Zdroj B.html, Zdroj C.html z balíčku V2</a:t>
-            </a:r>
-          </a:p>
-          <a:p xmlns:a="http://schemas.openxmlformats.org/drawingml/2006/main">
-            <a:r>
-              <a:t>11–19 min – Zdroj B: Porovnej přesnost titulku, velikost vzorku a uvedená omezení.</a:t>
-            </a:r>
-          </a:p>
-          <a:p xmlns:a="http://schemas.openxmlformats.org/drawingml/2006/main">
-            <a:r>
-              <a:t>19–30 min – Zdroj C: Dohledávej původní tvrzení, metodu, výsledek a limity.</a:t>
-            </a:r>
-          </a:p>
-          <a:p xmlns:a="http://schemas.openxmlformats.org/drawingml/2006/main">
-            <a:r>
-              <a:t>30–39 min – Protokol a nový titulek: Požaduj formulaci odpovídající skutečné síle podkladů.</a:t>
+              <a:t>Hlavní aktivita využívá: Zdroj A.html, Zdroj B.html, Zdroj C.html z balíčku V2</a:t>
+            </a:r>
+          </a:p>
+          <a:p xmlns:a="http://schemas.openxmlformats.org/drawingml/2006/main">
+            <a:r>
+              <a:t>11–19 min – Zdroj B: Porovnej přesnost titulku, velikost vzorku a uvedená omezení.</a:t>
+            </a:r>
+          </a:p>
+          <a:p xmlns:a="http://schemas.openxmlformats.org/drawingml/2006/main">
+            <a:r>
+              <a:t>19–30 min – Zdroj C: Dohledávej původní tvrzení, metodu, výsledek a limity.</a:t>
+            </a:r>
+          </a:p>
+          <a:p xmlns:a="http://schemas.openxmlformats.org/drawingml/2006/main">
+            <a:r>
+              <a:t>30–39 min – Protokol a nový titulek: Požaduj formulaci odpovídající skutečné síle podkladů.</a:t>
             </a:r>
           </a:p>
           <a:p xmlns:a="http://schemas.openxmlformats.org/drawingml/2006/main">
@@ -833,12 +833,12 @@
           </a:p>
           <a:p xmlns:a="http://schemas.openxmlformats.org/drawingml/2006/main">
             <a:r>
-              <a:t>Požadovaný výstup: Protokol 5P, opravený titulek a závěr s vyjádřenou mírou jistoty.</a:t>
-            </a:r>
-          </a:p>
-          <a:p xmlns:a="http://schemas.openxmlformats.org/drawingml/2006/main">
-            <a:r>
-              <a:t>Během práce nepřebírej myš za studenta. Pomáhej otázkami z dalšího snímku a žádej, aby každé rozhodnutí opřel o konkrétní znak nebo zdroj.</a:t>
+              <a:t>Požadovaný výstup: Protokol 5P, opravený titulek a závěr s vyjádřenou mírou jistoty.</a:t>
+            </a:r>
+          </a:p>
+          <a:p xmlns:a="http://schemas.openxmlformats.org/drawingml/2006/main">
+            <a:r>
+              <a:t>Během práce nepřebírej myš za studenta. Pomáhej otázkami z dalšího snímku a žádej, aby každé rozhodnutí opřel o konkrétní znak nebo zdroj.</a:t>
             </a:r>
           </a:p>
         </p:txBody>
@@ -908,27 +908,27 @@
           <a:lstStyle xmlns:a="http://schemas.openxmlformats.org/drawingml/2006/main"/>
           <a:p xmlns:a="http://schemas.openxmlformats.org/drawingml/2006/main">
             <a:r>
-              <a:t>Kritérium úspěchu: Student dohledá původní zdroj, uvede omezení studie a odliší data od obchodního tvrzení.</a:t>
-            </a:r>
-          </a:p>
-          <a:p xmlns:a="http://schemas.openxmlformats.org/drawingml/2006/main">
-            <a:r>
-              <a:t>Vodicí otázky: Kdo obsah vytvořil a jaký má vztah k tvrzení? | Kde je původní studie a co skutečně měřila? | Která část titulku jde dál než dostupná data?</a:t>
-            </a:r>
-          </a:p>
-          <a:p xmlns:a="http://schemas.openxmlformats.org/drawingml/2006/main">
-            <a:r>
-              <a:t>Podpora: Rozděl protokol na pět barevně označených polí a každé skupině přiděl nejprve jedno P.</a:t>
-            </a:r>
-          </a:p>
-          <a:p xmlns:a="http://schemas.openxmlformats.org/drawingml/2006/main">
-            <a:r>
-              <a:t>Rozšíření: Studenti vytvoří dva titulky: přesný populárně-naučný a stále přitažlivý, ale nepřehánějící.</a:t>
-            </a:r>
-          </a:p>
-          <a:p xmlns:a="http://schemas.openxmlformats.org/drawingml/2006/main">
-            <a:r>
-              <a:t>Pro rychlou mezikontrolu nech dvojice vyměnit výstup a označit jeden dobře doložený bod a jednu otázku, která ještě zůstává.</a:t>
+              <a:t>Kritérium úspěchu: Student dohledá původní zdroj, uvede omezení studie a odliší data od obchodního tvrzení.</a:t>
+            </a:r>
+          </a:p>
+          <a:p xmlns:a="http://schemas.openxmlformats.org/drawingml/2006/main">
+            <a:r>
+              <a:t>Vodicí otázky: Kdo obsah vytvořil a jaký má vztah k tvrzení? | Kde je původní studie a co skutečně měřila? | Která část titulku jde dál než dostupná data?</a:t>
+            </a:r>
+          </a:p>
+          <a:p xmlns:a="http://schemas.openxmlformats.org/drawingml/2006/main">
+            <a:r>
+              <a:t>Podpora: Rozděl protokol na pět barevně označených polí a každé skupině přiděl nejprve jedno P.</a:t>
+            </a:r>
+          </a:p>
+          <a:p xmlns:a="http://schemas.openxmlformats.org/drawingml/2006/main">
+            <a:r>
+              <a:t>Rozšíření: Studenti vytvoří dva titulky: přesný populárně-naučný a stále přitažlivý, ale nepřehánějící.</a:t>
+            </a:r>
+          </a:p>
+          <a:p xmlns:a="http://schemas.openxmlformats.org/drawingml/2006/main">
+            <a:r>
+              <a:t>Pro rychlou mezikontrolu nech dvojice vyměnit výstup a označit jeden dobře doložený bod a jednu otázku, která ještě zůstává.</a:t>
             </a:r>
           </a:p>
         </p:txBody>
@@ -998,17 +998,17 @@
           <a:lstStyle xmlns:a="http://schemas.openxmlformats.org/drawingml/2006/main"/>
           <a:p xmlns:a="http://schemas.openxmlformats.org/drawingml/2006/main">
             <a:r>
-              <a:t>Očekávané závěry: Původce: A je komerční web prodávající playlist, B univerzitní komunikace, C původní fiktivní odborná studie. | Původní zdroj: Zdroj C s popisem metody, dat a omezení. | Podklady: 32 účastníků, tři podmínky a tři krátké úlohy; rozdíl se projevil pouze v jedné úloze. | Porovnání: Zdroj A zobecňuje dílčí výsledek a uvádí 40 %, které studie jako univerzální efekt nepotvrzuje. | Působení: Zdroj A používá naléhavý titulek a partnerský prodej; B informuje, C dokumentuje výzkum. | Přiměřený závěr: Malá pilotní studie zjistila dílčí rozdíl v jedné paměťové úloze; nelze tvrdit, že hudba zlepší paměť všem o 40 %.</a:t>
-            </a:r>
-          </a:p>
-          <a:p xmlns:a="http://schemas.openxmlformats.org/drawingml/2006/main">
-            <a:r>
-              <a:t>Časté chyby a intervence: „Profesionální vzhled znamená důvěryhodnost.“ → Design je pouze signál; rozhodují původ, podklady, transparentnost a nezávislé potvrzení. | „Zdroj B je původní studie.“ → Univerzitní zpráva výzkum shrnuje; původní metoda a omezení jsou až ve zdroji C. | Student rozhodne jen pravda/nepravda. → Požaduj přesnější formulaci a míru jistoty: potvrzeno, vyvráceno, nebo nelze rozhodnout.</a:t>
-            </a:r>
-          </a:p>
-          <a:p xmlns:a="http://schemas.openxmlformats.org/drawingml/2006/main">
-            <a:r>
-              <a:t>Nečti celý klíč. Vyber dva studentské postupy, které vedou k odlišným závěrům, a nech třídu určit, který je lépe podložený.</a:t>
+              <a:t>Očekávané závěry: Původce: A je komerční web prodávající playlist, B univerzitní komunikace, C původní fiktivní odborná studie. | Původní zdroj: Zdroj C s popisem metody, dat a omezení. | Podklady: 32 účastníků, tři podmínky a tři krátké úlohy; rozdíl se projevil pouze v jedné úloze. | Porovnání: Zdroj A zobecňuje dílčí výsledek a uvádí 40 %, které studie jako univerzální efekt nepotvrzuje. | Působení: Zdroj A používá naléhavý titulek a partnerský prodej; B informuje, C dokumentuje výzkum. | Přiměřený závěr: Malá pilotní studie zjistila dílčí rozdíl v jedné paměťové úloze; nelze tvrdit, že hudba zlepší paměť všem o 40 %.</a:t>
+            </a:r>
+          </a:p>
+          <a:p xmlns:a="http://schemas.openxmlformats.org/drawingml/2006/main">
+            <a:r>
+              <a:t>Časté chyby a intervence: „Profesionální vzhled znamená důvěryhodnost.“ → Design je pouze signál; rozhodují původ, podklady, transparentnost a nezávislé potvrzení. | „Zdroj B je původní studie.“ → Univerzitní zpráva výzkum shrnuje; původní metoda a omezení jsou až ve zdroji C. | Student rozhodne jen pravda/nepravda. → Požaduj přesnější formulaci a míru jistoty: potvrzeno, vyvráceno, nebo nelze rozhodnout.</a:t>
+            </a:r>
+          </a:p>
+          <a:p xmlns:a="http://schemas.openxmlformats.org/drawingml/2006/main">
+            <a:r>
+              <a:t>Nečti celý klíč. Vyber dva studentské postupy, které vedou k odlišným závěrům, a nech třídu určit, který je lépe podložený.</a:t>
             </a:r>
           </a:p>
         </p:txBody>
@@ -1078,27 +1078,27 @@
           <a:lstStyle xmlns:a="http://schemas.openxmlformats.org/drawingml/2006/main"/>
           <a:p xmlns:a="http://schemas.openxmlformats.org/drawingml/2006/main">
             <a:r>
-              <a:t>Exit ticket: Který jeden detail ze zdroje C nejvíce změnil tvé hodnocení titulku A a proč?</a:t>
-            </a:r>
-          </a:p>
-          <a:p xmlns:a="http://schemas.openxmlformats.org/drawingml/2006/main">
-            <a:r>
-              <a:t>Podpora: Rozděl protokol na pět barevně označených polí a každé skupině přiděl nejprve jedno P.</a:t>
-            </a:r>
-          </a:p>
-          <a:p xmlns:a="http://schemas.openxmlformats.org/drawingml/2006/main">
-            <a:r>
-              <a:t>Rozšíření: Studenti vytvoří dva titulky: přesný populárně-naučný a stále přitažlivý, ale nepřehánějící.</a:t>
-            </a:r>
-          </a:p>
-          <a:p xmlns:a="http://schemas.openxmlformats.org/drawingml/2006/main">
-            <a:r>
-              <a:t>Když technika selže: Všechny tři zdroje jsou offline; při problému s prohlížečem použij jejich shrnutí v pracovním sešitu.</a:t>
-            </a:r>
-          </a:p>
-          <a:p xmlns:a="http://schemas.openxmlformats.org/drawingml/2006/main">
-            <a:r>
-              <a:t>Vyber způsob odevzdání předem. Odpověď použij jako diagnostiku pro začátek další hodiny; nehodnoť pouze formální správnost, ale konkrétnost a zdůvodnění.</a:t>
+              <a:t>Exit ticket: Který jeden detail ze zdroje C nejvíce změnil tvé hodnocení titulku A a proč?</a:t>
+            </a:r>
+          </a:p>
+          <a:p xmlns:a="http://schemas.openxmlformats.org/drawingml/2006/main">
+            <a:r>
+              <a:t>Podpora: Rozděl protokol na pět barevně označených polí a každé skupině přiděl nejprve jedno P.</a:t>
+            </a:r>
+          </a:p>
+          <a:p xmlns:a="http://schemas.openxmlformats.org/drawingml/2006/main">
+            <a:r>
+              <a:t>Rozšíření: Studenti vytvoří dva titulky: přesný populárně-naučný a stále přitažlivý, ale nepřehánějící.</a:t>
+            </a:r>
+          </a:p>
+          <a:p xmlns:a="http://schemas.openxmlformats.org/drawingml/2006/main">
+            <a:r>
+              <a:t>Když technika selže: Všechny tři zdroje jsou offline; při problému s prohlížečem použij jejich shrnutí v pracovním sešitu.</a:t>
+            </a:r>
+          </a:p>
+          <a:p xmlns:a="http://schemas.openxmlformats.org/drawingml/2006/main">
+            <a:r>
+              <a:t>Vyber způsob odevzdání předem. Odpověď použij jako diagnostiku pro začátek další hodiny; nehodnoť pouze formální správnost, ale konkrétnost a zdůvodnění.</a:t>
             </a:r>
           </a:p>
         </p:txBody>
@@ -1829,7 +1829,7 @@
             </a:pPr>
             <a:r>
               <a:t>INTERNET, BEZPEČNOST
-A PRÁCE S INFORMACEMI</a:t>
+A PRÁCE S INFORMACEMI</a:t>
             </a:r>
           </a:p>
         </p:txBody>
@@ -1919,7 +1919,7 @@
               </a:defRPr>
             </a:pPr>
             <a:r>
-              <a:t>Student postupně porovná clickbaitový web, univerzitní zprávu a původní studii a vytvoří přiměřený závěr.</a:t>
+              <a:t>Student postupně porovná clickbaitový web, univerzitní zprávu a původní studii a vytvoří přiměřený závěr.</a:t>
             </a:r>
           </a:p>
         </p:txBody>
@@ -2809,7 +2809,7 @@
               </a:defRPr>
             </a:pPr>
             <a:r>
-              <a:t>Zjisti, kdo obsah vytvořil a jaký má vztah k tvrzení. Má něco prodat nebo pouze informuje?</a:t>
+              <a:t>Zjisti, kdo obsah vytvořil a jaký má vztah k tvrzení. Má něco prodat nebo pouze informuje?</a:t>
             </a:r>
           </a:p>
         </p:txBody>
@@ -3034,7 +3034,7 @@
               </a:defRPr>
             </a:pPr>
             <a:r>
-              <a:t>Podklady a působení</a:t>
+              <a:t>Podklady a působení</a:t>
             </a:r>
           </a:p>
         </p:txBody>
@@ -3079,7 +3079,7 @@
               </a:defRPr>
             </a:pPr>
             <a:r>
-              <a:t>Porovnej metodu, omezení a nezávislé zdroje. Sleduj také emoce a výzvu k akci.</a:t>
+              <a:t>Porovnej metodu, omezení a nezávislé zdroje. Sleduj také emoce a výzvu k akci.</a:t>
             </a:r>
           </a:p>
         </p:txBody>
@@ -3155,7 +3155,7 @@
               </a:defRPr>
             </a:pPr>
             <a:r>
-              <a:t>Nejde o rychlý tip. Jde o postup, který lze vysvětlit a zopakovat.</a:t>
+              <a:t>Nejde o rychlý tip. Jde o postup, který lze vysvětlit a zopakovat.</a:t>
             </a:r>
           </a:p>
         </p:txBody>
@@ -3485,7 +3485,7 @@
               </a:defRPr>
             </a:pPr>
             <a:r>
-              <a:t>Zdroj A.html, Zdroj B.html, Zdroj C.html ze složky Podklady k aktivitám</a:t>
+              <a:t>Zdroj A.html, Zdroj B.html, Zdroj C.html ze složky Podklady k aktivitám</a:t>
             </a:r>
           </a:p>
         </p:txBody>
@@ -3651,7 +3651,7 @@
               </a:defRPr>
             </a:pPr>
             <a:r>
-              <a:t>Zapiš, čemu chce článek, abys věřil, a k jaké akci tě vede.</a:t>
+              <a:t>Zapiš, čemu chce článek, abys věřil, a k jaké akci tě vede.</a:t>
             </a:r>
           </a:p>
         </p:txBody>
@@ -3772,7 +3772,7 @@
               </a:defRPr>
             </a:pPr>
             <a:r>
-              <a:t>Porovnej A, B a C</a:t>
+              <a:t>Porovnej A, B a C</a:t>
             </a:r>
           </a:p>
         </p:txBody>
@@ -3817,7 +3817,7 @@
               </a:defRPr>
             </a:pPr>
             <a:r>
-              <a:t>Dohledávej původní tvrzení, velikost vzorku, metodu, výsledek a omezení.</a:t>
+              <a:t>Dohledávej původní tvrzení, velikost vzorku, metodu, výsledek a omezení.</a:t>
             </a:r>
           </a:p>
         </p:txBody>
@@ -3983,7 +3983,7 @@
               </a:defRPr>
             </a:pPr>
             <a:r>
-              <a:t>Formuluj závěr, který odpovídá skutečné síle podkladů a přiznává nejistotu.</a:t>
+              <a:t>Formuluj závěr, který odpovídá skutečné síle podkladů a přiznává nejistotu.</a:t>
             </a:r>
           </a:p>
         </p:txBody>
@@ -4073,7 +4073,7 @@
               </a:defRPr>
             </a:pPr>
             <a:r>
-              <a:t>Protokol 5P, opravený titulek a závěr s vyjádřenou mírou jistoty.</a:t>
+              <a:t>Protokol 5P, opravený titulek a závěr s vyjádřenou mírou jistoty.</a:t>
             </a:r>
           </a:p>
         </p:txBody>
@@ -4479,7 +4479,7 @@
               </a:defRPr>
             </a:pPr>
             <a:r>
-              <a:t>Student dohledá původní zdroj, uvede omezení studie a odliší data od obchodního tvrzení.</a:t>
+              <a:t>Student dohledá původní zdroj, uvede omezení studie a odliší data od obchodního tvrzení.</a:t>
             </a:r>
           </a:p>
         </p:txBody>
@@ -4645,7 +4645,7 @@
               </a:defRPr>
             </a:pPr>
             <a:r>
-              <a:t>Kdo obsah vytvořil a jaký má vztah k tvrzení?</a:t>
+              <a:t>Kdo obsah vytvořil a jaký má vztah k tvrzení?</a:t>
             </a:r>
           </a:p>
         </p:txBody>
@@ -4811,7 +4811,7 @@
               </a:defRPr>
             </a:pPr>
             <a:r>
-              <a:t>Kde je původní studie a co skutečně měřila?</a:t>
+              <a:t>Kde je původní studie a co skutečně měřila?</a:t>
             </a:r>
           </a:p>
         </p:txBody>
@@ -5352,7 +5352,7 @@
               </a:defRPr>
             </a:pPr>
             <a:r>
-              <a:t>A je komerční web prodávající playlist, B univerzitní komunikace, C původní fiktivní odborná studie.</a:t>
+              <a:t>A je komerční web prodávající playlist, B univerzitní komunikace, C původní fiktivní odborná studie.</a:t>
             </a:r>
           </a:p>
         </p:txBody>
@@ -5442,7 +5442,7 @@
               </a:defRPr>
             </a:pPr>
             <a:r>
-              <a:t>Zdroj C s popisem metody, dat a omezení.</a:t>
+              <a:t>Zdroj C s popisem metody, dat a omezení.</a:t>
             </a:r>
           </a:p>
         </p:txBody>
@@ -5532,7 +5532,7 @@
               </a:defRPr>
             </a:pPr>
             <a:r>
-              <a:t>32 účastníků, tři podmínky a tři krátké úlohy; rozdíl se projevil pouze v jedné úloze.</a:t>
+              <a:t>32 účastníků, tři podmínky a tři krátké úlohy; rozdíl se projevil pouze v jedné úloze.</a:t>
             </a:r>
           </a:p>
         </p:txBody>
@@ -5698,7 +5698,7 @@
               </a:defRPr>
             </a:pPr>
             <a:r>
-              <a:t>Design je pouze signál; rozhodují původ, podklady, transparentnost a nezávislé potvrzení.</a:t>
+              <a:t>Design je pouze signál; rozhodují původ, podklady, transparentnost a nezávislé potvrzení.</a:t>
             </a:r>
           </a:p>
         </p:txBody>
@@ -5743,7 +5743,7 @@
               </a:defRPr>
             </a:pPr>
             <a:r>
-              <a:t>Vrať se k úvodnímu rozhodnutí. Co bys teď změnil — a proč?</a:t>
+              <a:t>Vrať se k úvodnímu rozhodnutí. Co bys teď změnil — a proč?</a:t>
             </a:r>
           </a:p>
         </p:txBody>
@@ -5938,7 +5938,7 @@
               </a:defRPr>
             </a:pPr>
             <a:r>
-              <a:t>Který jeden detail ze zdroje C nejvíce změnil tvé hodnocení titulku A a proč?</a:t>
+              <a:t>Který jeden detail ze zdroje C nejvíce změnil tvé hodnocení titulku A a proč?</a:t>
             </a:r>
           </a:p>
         </p:txBody>
